--- a/assets/fiches/A8-fiche-1h30.pptx
+++ b/assets/fiches/A8-fiche-1h30.pptx
@@ -3084,9 +3084,12 @@
   <p:cSld>
     <p:bg>
       <p:bgPr>
-        <a:solidFill>
-          <a:srgbClr val="FFFFFF"/>
-        </a:solidFill>
+        <a:blipFill>
+          <a:blip r:embed="rId2"/>
+          <a:stretch>
+            <a:fillRect/>
+          </a:stretch>
+        </a:blipFill>
         <a:effectLst/>
       </p:bgPr>
     </p:bg>
@@ -3097,35 +3100,9 @@
         <p:nvPr/>
       </p:nvGrpSpPr>
       <p:grpSpPr/>
-      <p:pic>
-        <p:nvPicPr>
-          <p:cNvPr id="2" name="Picture 1" descr="bg-p1.png"/>
-          <p:cNvPicPr>
-            <a:picLocks noChangeAspect="1"/>
-          </p:cNvPicPr>
-          <p:nvPr/>
-        </p:nvPicPr>
-        <p:blipFill>
-          <a:blip r:embed="rId2">
-            <a:alphaModFix amt="80000"/>
-          </a:blip>
-          <a:stretch>
-            <a:fillRect/>
-          </a:stretch>
-        </p:blipFill>
-        <p:spPr>
-          <a:xfrm>
-            <a:off x="0" y="0"/>
-            <a:ext cx="7556399" cy="10692000"/>
-          </a:xfrm>
-          <a:prstGeom prst="rect">
-            <a:avLst/>
-          </a:prstGeom>
-        </p:spPr>
-      </p:pic>
-      <p:sp>
-        <p:nvSpPr>
-          <p:cNvPr id="3" name="TextBox 2"/>
+      <p:sp>
+        <p:nvSpPr>
+          <p:cNvPr id="2" name="TextBox 1"/>
           <p:cNvSpPr txBox="1"/>
           <p:nvPr/>
         </p:nvSpPr>
@@ -3186,7 +3163,7 @@
       </p:sp>
       <p:sp>
         <p:nvSpPr>
-          <p:cNvPr id="4" name="Rectangle 3"/>
+          <p:cNvPr id="3" name="Rectangle 2"/>
           <p:cNvSpPr/>
           <p:nvPr/>
         </p:nvSpPr>
@@ -3229,7 +3206,7 @@
       </p:sp>
       <p:sp>
         <p:nvSpPr>
-          <p:cNvPr id="5" name="TextBox 4"/>
+          <p:cNvPr id="4" name="TextBox 3"/>
           <p:cNvSpPr txBox="1"/>
           <p:nvPr/>
         </p:nvSpPr>
@@ -3347,7 +3324,7 @@
       </p:sp>
       <p:sp>
         <p:nvSpPr>
-          <p:cNvPr id="6" name="Rectangle 5"/>
+          <p:cNvPr id="5" name="Rectangle 4"/>
           <p:cNvSpPr/>
           <p:nvPr/>
         </p:nvSpPr>
@@ -3390,7 +3367,7 @@
       </p:sp>
       <p:sp>
         <p:nvSpPr>
-          <p:cNvPr id="7" name="TextBox 6"/>
+          <p:cNvPr id="6" name="TextBox 5"/>
           <p:cNvSpPr txBox="1"/>
           <p:nvPr/>
         </p:nvSpPr>
@@ -3508,7 +3485,7 @@
       </p:sp>
       <p:sp>
         <p:nvSpPr>
-          <p:cNvPr id="8" name="Rectangle 7"/>
+          <p:cNvPr id="7" name="Rectangle 6"/>
           <p:cNvSpPr/>
           <p:nvPr/>
         </p:nvSpPr>
@@ -3551,7 +3528,7 @@
       </p:sp>
       <p:sp>
         <p:nvSpPr>
-          <p:cNvPr id="9" name="Rectangle 8"/>
+          <p:cNvPr id="8" name="Rectangle 7"/>
           <p:cNvSpPr/>
           <p:nvPr/>
         </p:nvSpPr>
@@ -3592,7 +3569,7 @@
       </p:sp>
       <p:sp>
         <p:nvSpPr>
-          <p:cNvPr id="10" name="Rectangle 9"/>
+          <p:cNvPr id="9" name="Rectangle 8"/>
           <p:cNvSpPr/>
           <p:nvPr/>
         </p:nvSpPr>
@@ -3633,14 +3610,56 @@
       </p:sp>
       <p:sp>
         <p:nvSpPr>
+          <p:cNvPr id="10" name="TextBox 9"/>
+          <p:cNvSpPr txBox="1"/>
+          <p:nvPr/>
+        </p:nvSpPr>
+        <p:spPr>
+          <a:xfrm>
+            <a:off x="763200" y="3031200"/>
+            <a:ext cx="468000" cy="158400"/>
+          </a:xfrm>
+          <a:prstGeom prst="rect">
+            <a:avLst/>
+          </a:prstGeom>
+          <a:noFill/>
+        </p:spPr>
+        <p:txBody>
+          <a:bodyPr wrap="square" tIns="0" bIns="0" lIns="18000" rIns="18000">
+            <a:spAutoFit/>
+          </a:bodyPr>
+          <a:lstStyle/>
+          <a:p>
+            <a:pPr algn="ctr">
+              <a:spcBef>
+                <a:spcPts val="0"/>
+              </a:spcBef>
+              <a:spcAft>
+                <a:spcPts val="100"/>
+              </a:spcAft>
+            </a:pPr>
+            <a:r>
+              <a:rPr sz="800" b="1" i="0">
+                <a:solidFill>
+                  <a:srgbClr val="FFFFFF"/>
+                </a:solidFill>
+                <a:latin typeface="Arial"/>
+              </a:rPr>
+              <a:t>0:02</a:t>
+            </a:r>
+          </a:p>
+        </p:txBody>
+      </p:sp>
+      <p:sp>
+        <p:nvSpPr>
           <p:cNvPr id="11" name="TextBox 10"/>
           <p:cNvSpPr txBox="1"/>
           <p:nvPr/>
         </p:nvSpPr>
         <p:spPr>
           <a:xfrm>
-            <a:off x="763200" y="3031200"/>
-            <a:ext cx="468000" cy="158400"/>
+            <a:off x="1303200" y="2800800"/>
+            <a:ext cx="5652000" cy="655200"/>
           </a:xfrm>
           <a:prstGeom prst="rect">
             <a:avLst/>
@@ -3653,7 +3672,7 @@
           </a:bodyPr>
           <a:lstStyle/>
           <a:p>
-            <a:pPr algn="ctr">
+            <a:pPr algn="l">
               <a:spcBef>
                 <a:spcPts val="0"/>
               </a:spcBef>
@@ -3664,36 +3683,13 @@
             <a:r>
               <a:rPr sz="800" b="1" i="0">
                 <a:solidFill>
-                  <a:srgbClr val="FFFFFF"/>
-                </a:solidFill>
-                <a:latin typeface="Arial"/>
-              </a:rPr>
-              <a:t>0:02</a:t>
-            </a:r>
-          </a:p>
-        </p:txBody>
-      </p:sp>
-      <p:sp>
-        <p:nvSpPr>
-          <p:cNvPr id="12" name="TextBox 11"/>
-          <p:cNvSpPr txBox="1"/>
-          <p:nvPr/>
-        </p:nvSpPr>
-        <p:spPr>
-          <a:xfrm>
-            <a:off x="1303200" y="2800800"/>
-            <a:ext cx="5652000" cy="655200"/>
-          </a:xfrm>
-          <a:prstGeom prst="rect">
-            <a:avLst/>
-          </a:prstGeom>
-          <a:noFill/>
-        </p:spPr>
-        <p:txBody>
-          <a:bodyPr wrap="square" tIns="0" bIns="0" lIns="18000" rIns="18000">
-            <a:spAutoFit/>
-          </a:bodyPr>
-          <a:lstStyle/>
+                  <a:srgbClr val="5EB3D2"/>
+                </a:solidFill>
+                <a:latin typeface="Arial"/>
+              </a:rPr>
+              <a:t>8 min</a:t>
+            </a:r>
+          </a:p>
           <a:p>
             <a:pPr algn="l">
               <a:spcBef>
@@ -3704,13 +3700,13 @@
               </a:spcAft>
             </a:pPr>
             <a:r>
-              <a:rPr sz="800" b="1" i="0">
-                <a:solidFill>
-                  <a:srgbClr val="5EB3D2"/>
-                </a:solidFill>
-                <a:latin typeface="Arial"/>
-              </a:rPr>
-              <a:t>8 min</a:t>
+              <a:rPr sz="900" b="1" i="0">
+                <a:solidFill>
+                  <a:srgbClr val="2B2B2B"/>
+                </a:solidFill>
+                <a:latin typeface="Arial"/>
+              </a:rPr>
+              <a:t>Le numérique : un secteur qui pèse lourd</a:t>
             </a:r>
           </a:p>
           <a:p>
@@ -3723,31 +3719,12 @@
               </a:spcAft>
             </a:pPr>
             <a:r>
-              <a:rPr sz="900" b="1" i="0">
+              <a:rPr sz="800" b="0" i="0">
                 <a:solidFill>
                   <a:srgbClr val="2B2B2B"/>
                 </a:solidFill>
                 <a:latin typeface="Arial"/>
               </a:rPr>
-              <a:t>Le numérique : un secteur qui pèse lourd</a:t>
-            </a:r>
-          </a:p>
-          <a:p>
-            <a:pPr algn="l">
-              <a:spcBef>
-                <a:spcPts val="0"/>
-              </a:spcBef>
-              <a:spcAft>
-                <a:spcPts val="100"/>
-              </a:spcAft>
-            </a:pPr>
-            <a:r>
-              <a:rPr sz="800" b="0" i="0">
-                <a:solidFill>
-                  <a:srgbClr val="2B2B2B"/>
-                </a:solidFill>
-                <a:latin typeface="Arial"/>
-              </a:rPr>
               <a:t>. On l'oublie souvent, mais le numérique est l'un des secteurs les plus émetteurs de gaz à effet de serre au monde. Et sa croissance est rapide.</a:t>
             </a:r>
           </a:p>
@@ -3755,7 +3732,7 @@
       </p:sp>
       <p:sp>
         <p:nvSpPr>
-          <p:cNvPr id="13" name="Rectangle 12"/>
+          <p:cNvPr id="12" name="Rectangle 11"/>
           <p:cNvSpPr/>
           <p:nvPr/>
         </p:nvSpPr>
@@ -3798,7 +3775,7 @@
       </p:sp>
       <p:sp>
         <p:nvSpPr>
-          <p:cNvPr id="14" name="Rectangle 13"/>
+          <p:cNvPr id="13" name="Rectangle 12"/>
           <p:cNvSpPr/>
           <p:nvPr/>
         </p:nvSpPr>
@@ -3839,7 +3816,7 @@
       </p:sp>
       <p:sp>
         <p:nvSpPr>
-          <p:cNvPr id="15" name="Rectangle 14"/>
+          <p:cNvPr id="14" name="Rectangle 13"/>
           <p:cNvSpPr/>
           <p:nvPr/>
         </p:nvSpPr>
@@ -3880,14 +3857,56 @@
       </p:sp>
       <p:sp>
         <p:nvSpPr>
+          <p:cNvPr id="15" name="TextBox 14"/>
+          <p:cNvSpPr txBox="1"/>
+          <p:nvPr/>
+        </p:nvSpPr>
+        <p:spPr>
+          <a:xfrm>
+            <a:off x="763200" y="3780000"/>
+            <a:ext cx="468000" cy="158400"/>
+          </a:xfrm>
+          <a:prstGeom prst="rect">
+            <a:avLst/>
+          </a:prstGeom>
+          <a:noFill/>
+        </p:spPr>
+        <p:txBody>
+          <a:bodyPr wrap="square" tIns="0" bIns="0" lIns="18000" rIns="18000">
+            <a:spAutoFit/>
+          </a:bodyPr>
+          <a:lstStyle/>
+          <a:p>
+            <a:pPr algn="ctr">
+              <a:spcBef>
+                <a:spcPts val="0"/>
+              </a:spcBef>
+              <a:spcAft>
+                <a:spcPts val="100"/>
+              </a:spcAft>
+            </a:pPr>
+            <a:r>
+              <a:rPr sz="800" b="1" i="0">
+                <a:solidFill>
+                  <a:srgbClr val="FFFFFF"/>
+                </a:solidFill>
+                <a:latin typeface="Arial"/>
+              </a:rPr>
+              <a:t>0:10</a:t>
+            </a:r>
+          </a:p>
+        </p:txBody>
+      </p:sp>
+      <p:sp>
+        <p:nvSpPr>
           <p:cNvPr id="16" name="TextBox 15"/>
           <p:cNvSpPr txBox="1"/>
           <p:nvPr/>
         </p:nvSpPr>
         <p:spPr>
           <a:xfrm>
-            <a:off x="763200" y="3780000"/>
-            <a:ext cx="468000" cy="158400"/>
+            <a:off x="1303200" y="3549600"/>
+            <a:ext cx="5652000" cy="655200"/>
           </a:xfrm>
           <a:prstGeom prst="rect">
             <a:avLst/>
@@ -3900,7 +3919,7 @@
           </a:bodyPr>
           <a:lstStyle/>
           <a:p>
-            <a:pPr algn="ctr">
+            <a:pPr algn="l">
               <a:spcBef>
                 <a:spcPts val="0"/>
               </a:spcBef>
@@ -3911,36 +3930,13 @@
             <a:r>
               <a:rPr sz="800" b="1" i="0">
                 <a:solidFill>
-                  <a:srgbClr val="FFFFFF"/>
-                </a:solidFill>
-                <a:latin typeface="Arial"/>
-              </a:rPr>
-              <a:t>0:10</a:t>
-            </a:r>
-          </a:p>
-        </p:txBody>
-      </p:sp>
-      <p:sp>
-        <p:nvSpPr>
-          <p:cNvPr id="17" name="TextBox 16"/>
-          <p:cNvSpPr txBox="1"/>
-          <p:nvPr/>
-        </p:nvSpPr>
-        <p:spPr>
-          <a:xfrm>
-            <a:off x="1303200" y="3549600"/>
-            <a:ext cx="5652000" cy="655200"/>
-          </a:xfrm>
-          <a:prstGeom prst="rect">
-            <a:avLst/>
-          </a:prstGeom>
-          <a:noFill/>
-        </p:spPr>
-        <p:txBody>
-          <a:bodyPr wrap="square" tIns="0" bIns="0" lIns="18000" rIns="18000">
-            <a:spAutoFit/>
-          </a:bodyPr>
-          <a:lstStyle/>
+                  <a:srgbClr val="4388BC"/>
+                </a:solidFill>
+                <a:latin typeface="Arial"/>
+              </a:rPr>
+              <a:t>8 min</a:t>
+            </a:r>
+          </a:p>
           <a:p>
             <a:pPr algn="l">
               <a:spcBef>
@@ -3951,13 +3947,13 @@
               </a:spcAft>
             </a:pPr>
             <a:r>
-              <a:rPr sz="800" b="1" i="0">
-                <a:solidFill>
-                  <a:srgbClr val="4388BC"/>
-                </a:solidFill>
-                <a:latin typeface="Arial"/>
-              </a:rPr>
-              <a:t>8 min</a:t>
+              <a:rPr sz="900" b="1" i="0">
+                <a:solidFill>
+                  <a:srgbClr val="2B2B2B"/>
+                </a:solidFill>
+                <a:latin typeface="Arial"/>
+              </a:rPr>
+              <a:t>Nos appareils : le cœur du problème</a:t>
             </a:r>
           </a:p>
           <a:p>
@@ -3970,31 +3966,12 @@
               </a:spcAft>
             </a:pPr>
             <a:r>
-              <a:rPr sz="900" b="1" i="0">
+              <a:rPr sz="800" b="0" i="0">
                 <a:solidFill>
                   <a:srgbClr val="2B2B2B"/>
                 </a:solidFill>
                 <a:latin typeface="Arial"/>
               </a:rPr>
-              <a:t>Nos appareils : le cœur du problème</a:t>
-            </a:r>
-          </a:p>
-          <a:p>
-            <a:pPr algn="l">
-              <a:spcBef>
-                <a:spcPts val="0"/>
-              </a:spcBef>
-              <a:spcAft>
-                <a:spcPts val="100"/>
-              </a:spcAft>
-            </a:pPr>
-            <a:r>
-              <a:rPr sz="800" b="0" i="0">
-                <a:solidFill>
-                  <a:srgbClr val="2B2B2B"/>
-                </a:solidFill>
-                <a:latin typeface="Arial"/>
-              </a:rPr>
               <a:t>. La fabrication de nos appareils numériques est de loin la source d'impact la plus importante — bien plus que leur utilisation quotidienne.</a:t>
             </a:r>
           </a:p>
@@ -4002,7 +3979,7 @@
       </p:sp>
       <p:sp>
         <p:nvSpPr>
-          <p:cNvPr id="18" name="Rectangle 17"/>
+          <p:cNvPr id="17" name="Rectangle 16"/>
           <p:cNvSpPr/>
           <p:nvPr/>
         </p:nvSpPr>
@@ -4045,7 +4022,7 @@
       </p:sp>
       <p:sp>
         <p:nvSpPr>
-          <p:cNvPr id="19" name="Rectangle 18"/>
+          <p:cNvPr id="18" name="Rectangle 17"/>
           <p:cNvSpPr/>
           <p:nvPr/>
         </p:nvSpPr>
@@ -4086,7 +4063,7 @@
       </p:sp>
       <p:sp>
         <p:nvSpPr>
-          <p:cNvPr id="20" name="Rectangle 19"/>
+          <p:cNvPr id="19" name="Rectangle 18"/>
           <p:cNvSpPr/>
           <p:nvPr/>
         </p:nvSpPr>
@@ -4127,14 +4104,56 @@
       </p:sp>
       <p:sp>
         <p:nvSpPr>
+          <p:cNvPr id="20" name="TextBox 19"/>
+          <p:cNvSpPr txBox="1"/>
+          <p:nvPr/>
+        </p:nvSpPr>
+        <p:spPr>
+          <a:xfrm>
+            <a:off x="763200" y="4528800"/>
+            <a:ext cx="468000" cy="158400"/>
+          </a:xfrm>
+          <a:prstGeom prst="rect">
+            <a:avLst/>
+          </a:prstGeom>
+          <a:noFill/>
+        </p:spPr>
+        <p:txBody>
+          <a:bodyPr wrap="square" tIns="0" bIns="0" lIns="18000" rIns="18000">
+            <a:spAutoFit/>
+          </a:bodyPr>
+          <a:lstStyle/>
+          <a:p>
+            <a:pPr algn="ctr">
+              <a:spcBef>
+                <a:spcPts val="0"/>
+              </a:spcBef>
+              <a:spcAft>
+                <a:spcPts val="100"/>
+              </a:spcAft>
+            </a:pPr>
+            <a:r>
+              <a:rPr sz="800" b="1" i="0">
+                <a:solidFill>
+                  <a:srgbClr val="FFFFFF"/>
+                </a:solidFill>
+                <a:latin typeface="Arial"/>
+              </a:rPr>
+              <a:t>0:18</a:t>
+            </a:r>
+          </a:p>
+        </p:txBody>
+      </p:sp>
+      <p:sp>
+        <p:nvSpPr>
           <p:cNvPr id="21" name="TextBox 20"/>
           <p:cNvSpPr txBox="1"/>
           <p:nvPr/>
         </p:nvSpPr>
         <p:spPr>
           <a:xfrm>
-            <a:off x="763200" y="4528800"/>
-            <a:ext cx="468000" cy="158400"/>
+            <a:off x="1303200" y="4298400"/>
+            <a:ext cx="5652000" cy="655200"/>
           </a:xfrm>
           <a:prstGeom prst="rect">
             <a:avLst/>
@@ -4147,7 +4166,7 @@
           </a:bodyPr>
           <a:lstStyle/>
           <a:p>
-            <a:pPr algn="ctr">
+            <a:pPr algn="l">
               <a:spcBef>
                 <a:spcPts val="0"/>
               </a:spcBef>
@@ -4158,36 +4177,13 @@
             <a:r>
               <a:rPr sz="800" b="1" i="0">
                 <a:solidFill>
-                  <a:srgbClr val="FFFFFF"/>
-                </a:solidFill>
-                <a:latin typeface="Arial"/>
-              </a:rPr>
-              <a:t>0:18</a:t>
-            </a:r>
-          </a:p>
-        </p:txBody>
-      </p:sp>
-      <p:sp>
-        <p:nvSpPr>
-          <p:cNvPr id="22" name="TextBox 21"/>
-          <p:cNvSpPr txBox="1"/>
-          <p:nvPr/>
-        </p:nvSpPr>
-        <p:spPr>
-          <a:xfrm>
-            <a:off x="1303200" y="4298400"/>
-            <a:ext cx="5652000" cy="655200"/>
-          </a:xfrm>
-          <a:prstGeom prst="rect">
-            <a:avLst/>
-          </a:prstGeom>
-          <a:noFill/>
-        </p:spPr>
-        <p:txBody>
-          <a:bodyPr wrap="square" tIns="0" bIns="0" lIns="18000" rIns="18000">
-            <a:spAutoFit/>
-          </a:bodyPr>
-          <a:lstStyle/>
+                  <a:srgbClr val="187C88"/>
+                </a:solidFill>
+                <a:latin typeface="Arial"/>
+              </a:rPr>
+              <a:t>8 min</a:t>
+            </a:r>
+          </a:p>
           <a:p>
             <a:pPr algn="l">
               <a:spcBef>
@@ -4198,13 +4194,13 @@
               </a:spcAft>
             </a:pPr>
             <a:r>
-              <a:rPr sz="800" b="1" i="0">
-                <a:solidFill>
-                  <a:srgbClr val="187C88"/>
-                </a:solidFill>
-                <a:latin typeface="Arial"/>
-              </a:rPr>
-              <a:t>8 min</a:t>
+              <a:rPr sz="900" b="1" i="0">
+                <a:solidFill>
+                  <a:srgbClr val="2B2B2B"/>
+                </a:solidFill>
+                <a:latin typeface="Arial"/>
+              </a:rPr>
+              <a:t>L'usage quotidien : des impacts souvent invisibl…</a:t>
             </a:r>
           </a:p>
           <a:p>
@@ -4217,31 +4213,12 @@
               </a:spcAft>
             </a:pPr>
             <a:r>
-              <a:rPr sz="900" b="1" i="0">
+              <a:rPr sz="800" b="0" i="0">
                 <a:solidFill>
                   <a:srgbClr val="2B2B2B"/>
                 </a:solidFill>
                 <a:latin typeface="Arial"/>
               </a:rPr>
-              <a:t>L'usage quotidien : des impacts souvent invisibl…</a:t>
-            </a:r>
-          </a:p>
-          <a:p>
-            <a:pPr algn="l">
-              <a:spcBef>
-                <a:spcPts val="0"/>
-              </a:spcBef>
-              <a:spcAft>
-                <a:spcPts val="100"/>
-              </a:spcAft>
-            </a:pPr>
-            <a:r>
-              <a:rPr sz="800" b="0" i="0">
-                <a:solidFill>
-                  <a:srgbClr val="2B2B2B"/>
-                </a:solidFill>
-                <a:latin typeface="Arial"/>
-              </a:rPr>
               <a:t>. Streaming vidéo</a:t>
             </a:r>
           </a:p>
@@ -4249,7 +4226,7 @@
       </p:sp>
       <p:sp>
         <p:nvSpPr>
-          <p:cNvPr id="23" name="Rectangle 22"/>
+          <p:cNvPr id="22" name="Rectangle 21"/>
           <p:cNvSpPr/>
           <p:nvPr/>
         </p:nvSpPr>
@@ -4292,7 +4269,7 @@
       </p:sp>
       <p:sp>
         <p:nvSpPr>
-          <p:cNvPr id="24" name="Rectangle 23"/>
+          <p:cNvPr id="23" name="Rectangle 22"/>
           <p:cNvSpPr/>
           <p:nvPr/>
         </p:nvSpPr>
@@ -4333,7 +4310,7 @@
       </p:sp>
       <p:sp>
         <p:nvSpPr>
-          <p:cNvPr id="25" name="Rectangle 24"/>
+          <p:cNvPr id="24" name="Rectangle 23"/>
           <p:cNvSpPr/>
           <p:nvPr/>
         </p:nvSpPr>
@@ -4374,14 +4351,56 @@
       </p:sp>
       <p:sp>
         <p:nvSpPr>
+          <p:cNvPr id="25" name="TextBox 24"/>
+          <p:cNvSpPr txBox="1"/>
+          <p:nvPr/>
+        </p:nvSpPr>
+        <p:spPr>
+          <a:xfrm>
+            <a:off x="763200" y="5277600"/>
+            <a:ext cx="468000" cy="158400"/>
+          </a:xfrm>
+          <a:prstGeom prst="rect">
+            <a:avLst/>
+          </a:prstGeom>
+          <a:noFill/>
+        </p:spPr>
+        <p:txBody>
+          <a:bodyPr wrap="square" tIns="0" bIns="0" lIns="18000" rIns="18000">
+            <a:spAutoFit/>
+          </a:bodyPr>
+          <a:lstStyle/>
+          <a:p>
+            <a:pPr algn="ctr">
+              <a:spcBef>
+                <a:spcPts val="0"/>
+              </a:spcBef>
+              <a:spcAft>
+                <a:spcPts val="100"/>
+              </a:spcAft>
+            </a:pPr>
+            <a:r>
+              <a:rPr sz="800" b="1" i="0">
+                <a:solidFill>
+                  <a:srgbClr val="FFFFFF"/>
+                </a:solidFill>
+                <a:latin typeface="Arial"/>
+              </a:rPr>
+              <a:t>0:26</a:t>
+            </a:r>
+          </a:p>
+        </p:txBody>
+      </p:sp>
+      <p:sp>
+        <p:nvSpPr>
           <p:cNvPr id="26" name="TextBox 25"/>
           <p:cNvSpPr txBox="1"/>
           <p:nvPr/>
         </p:nvSpPr>
         <p:spPr>
           <a:xfrm>
-            <a:off x="763200" y="5277600"/>
-            <a:ext cx="468000" cy="158400"/>
+            <a:off x="1303200" y="5047200"/>
+            <a:ext cx="5652000" cy="655200"/>
           </a:xfrm>
           <a:prstGeom prst="rect">
             <a:avLst/>
@@ -4394,7 +4413,7 @@
           </a:bodyPr>
           <a:lstStyle/>
           <a:p>
-            <a:pPr algn="ctr">
+            <a:pPr algn="l">
               <a:spcBef>
                 <a:spcPts val="0"/>
               </a:spcBef>
@@ -4405,36 +4424,13 @@
             <a:r>
               <a:rPr sz="800" b="1" i="0">
                 <a:solidFill>
-                  <a:srgbClr val="FFFFFF"/>
-                </a:solidFill>
-                <a:latin typeface="Arial"/>
-              </a:rPr>
-              <a:t>0:26</a:t>
-            </a:r>
-          </a:p>
-        </p:txBody>
-      </p:sp>
-      <p:sp>
-        <p:nvSpPr>
-          <p:cNvPr id="27" name="TextBox 26"/>
-          <p:cNvSpPr txBox="1"/>
-          <p:nvPr/>
-        </p:nvSpPr>
-        <p:spPr>
-          <a:xfrm>
-            <a:off x="1303200" y="5047200"/>
-            <a:ext cx="5652000" cy="655200"/>
-          </a:xfrm>
-          <a:prstGeom prst="rect">
-            <a:avLst/>
-          </a:prstGeom>
-          <a:noFill/>
-        </p:spPr>
-        <p:txBody>
-          <a:bodyPr wrap="square" tIns="0" bIns="0" lIns="18000" rIns="18000">
-            <a:spAutoFit/>
-          </a:bodyPr>
-          <a:lstStyle/>
+                  <a:srgbClr val="4388BC"/>
+                </a:solidFill>
+                <a:latin typeface="Arial"/>
+              </a:rPr>
+              <a:t>8 min</a:t>
+            </a:r>
+          </a:p>
           <a:p>
             <a:pPr algn="l">
               <a:spcBef>
@@ -4445,13 +4441,13 @@
               </a:spcAft>
             </a:pPr>
             <a:r>
-              <a:rPr sz="800" b="1" i="0">
-                <a:solidFill>
-                  <a:srgbClr val="4388BC"/>
-                </a:solidFill>
-                <a:latin typeface="Arial"/>
-              </a:rPr>
-              <a:t>8 min</a:t>
+              <a:rPr sz="900" b="1" i="0">
+                <a:solidFill>
+                  <a:srgbClr val="2B2B2B"/>
+                </a:solidFill>
+                <a:latin typeface="Arial"/>
+              </a:rPr>
+              <a:t>Les data centers : des usines énergivores</a:t>
             </a:r>
           </a:p>
           <a:p>
@@ -4464,31 +4460,12 @@
               </a:spcAft>
             </a:pPr>
             <a:r>
-              <a:rPr sz="900" b="1" i="0">
+              <a:rPr sz="800" b="0" i="0">
                 <a:solidFill>
                   <a:srgbClr val="2B2B2B"/>
                 </a:solidFill>
                 <a:latin typeface="Arial"/>
               </a:rPr>
-              <a:t>Les data centers : des usines énergivores</a:t>
-            </a:r>
-          </a:p>
-          <a:p>
-            <a:pPr algn="l">
-              <a:spcBef>
-                <a:spcPts val="0"/>
-              </a:spcBef>
-              <a:spcAft>
-                <a:spcPts val="100"/>
-              </a:spcAft>
-            </a:pPr>
-            <a:r>
-              <a:rPr sz="800" b="0" i="0">
-                <a:solidFill>
-                  <a:srgbClr val="2B2B2B"/>
-                </a:solidFill>
-                <a:latin typeface="Arial"/>
-              </a:rPr>
               <a:t>. Ces infrastructures discrètes sont le moteur de notre monde numérique, hébergeant nos données et applications. Cependant, leur fonctionnement est incroyablement gourmand en ressources, notamment pour le refroidissement des serveurs et le maintien d'une température stable.</a:t>
             </a:r>
           </a:p>
@@ -4496,7 +4473,7 @@
       </p:sp>
       <p:sp>
         <p:nvSpPr>
-          <p:cNvPr id="28" name="Rectangle 27"/>
+          <p:cNvPr id="27" name="Rectangle 26"/>
           <p:cNvSpPr/>
           <p:nvPr/>
         </p:nvSpPr>
@@ -4539,7 +4516,7 @@
       </p:sp>
       <p:sp>
         <p:nvSpPr>
-          <p:cNvPr id="29" name="Rectangle 28"/>
+          <p:cNvPr id="28" name="Rectangle 27"/>
           <p:cNvSpPr/>
           <p:nvPr/>
         </p:nvSpPr>
@@ -4580,7 +4557,7 @@
       </p:sp>
       <p:sp>
         <p:nvSpPr>
-          <p:cNvPr id="30" name="Rectangle 29"/>
+          <p:cNvPr id="29" name="Rectangle 28"/>
           <p:cNvSpPr/>
           <p:nvPr/>
         </p:nvSpPr>
@@ -4621,14 +4598,56 @@
       </p:sp>
       <p:sp>
         <p:nvSpPr>
+          <p:cNvPr id="30" name="TextBox 29"/>
+          <p:cNvSpPr txBox="1"/>
+          <p:nvPr/>
+        </p:nvSpPr>
+        <p:spPr>
+          <a:xfrm>
+            <a:off x="763200" y="6026399"/>
+            <a:ext cx="468000" cy="158400"/>
+          </a:xfrm>
+          <a:prstGeom prst="rect">
+            <a:avLst/>
+          </a:prstGeom>
+          <a:noFill/>
+        </p:spPr>
+        <p:txBody>
+          <a:bodyPr wrap="square" tIns="0" bIns="0" lIns="18000" rIns="18000">
+            <a:spAutoFit/>
+          </a:bodyPr>
+          <a:lstStyle/>
+          <a:p>
+            <a:pPr algn="ctr">
+              <a:spcBef>
+                <a:spcPts val="0"/>
+              </a:spcBef>
+              <a:spcAft>
+                <a:spcPts val="100"/>
+              </a:spcAft>
+            </a:pPr>
+            <a:r>
+              <a:rPr sz="800" b="1" i="0">
+                <a:solidFill>
+                  <a:srgbClr val="FFFFFF"/>
+                </a:solidFill>
+                <a:latin typeface="Arial"/>
+              </a:rPr>
+              <a:t>0:34</a:t>
+            </a:r>
+          </a:p>
+        </p:txBody>
+      </p:sp>
+      <p:sp>
+        <p:nvSpPr>
           <p:cNvPr id="31" name="TextBox 30"/>
           <p:cNvSpPr txBox="1"/>
           <p:nvPr/>
         </p:nvSpPr>
         <p:spPr>
           <a:xfrm>
-            <a:off x="763200" y="6026399"/>
-            <a:ext cx="468000" cy="158400"/>
+            <a:off x="1303200" y="5796000"/>
+            <a:ext cx="5652000" cy="655200"/>
           </a:xfrm>
           <a:prstGeom prst="rect">
             <a:avLst/>
@@ -4641,7 +4660,7 @@
           </a:bodyPr>
           <a:lstStyle/>
           <a:p>
-            <a:pPr algn="ctr">
+            <a:pPr algn="l">
               <a:spcBef>
                 <a:spcPts val="0"/>
               </a:spcBef>
@@ -4652,36 +4671,13 @@
             <a:r>
               <a:rPr sz="800" b="1" i="0">
                 <a:solidFill>
-                  <a:srgbClr val="FFFFFF"/>
-                </a:solidFill>
-                <a:latin typeface="Arial"/>
-              </a:rPr>
-              <a:t>0:34</a:t>
-            </a:r>
-          </a:p>
-        </p:txBody>
-      </p:sp>
-      <p:sp>
-        <p:nvSpPr>
-          <p:cNvPr id="32" name="TextBox 31"/>
-          <p:cNvSpPr txBox="1"/>
-          <p:nvPr/>
-        </p:nvSpPr>
-        <p:spPr>
-          <a:xfrm>
-            <a:off x="1303200" y="5796000"/>
-            <a:ext cx="5652000" cy="655200"/>
-          </a:xfrm>
-          <a:prstGeom prst="rect">
-            <a:avLst/>
-          </a:prstGeom>
-          <a:noFill/>
-        </p:spPr>
-        <p:txBody>
-          <a:bodyPr wrap="square" tIns="0" bIns="0" lIns="18000" rIns="18000">
-            <a:spAutoFit/>
-          </a:bodyPr>
-          <a:lstStyle/>
+                  <a:srgbClr val="187C88"/>
+                </a:solidFill>
+                <a:latin typeface="Arial"/>
+              </a:rPr>
+              <a:t>8 min</a:t>
+            </a:r>
+          </a:p>
           <a:p>
             <a:pPr algn="l">
               <a:spcBef>
@@ -4692,13 +4688,13 @@
               </a:spcAft>
             </a:pPr>
             <a:r>
-              <a:rPr sz="800" b="1" i="0">
-                <a:solidFill>
-                  <a:srgbClr val="187C88"/>
-                </a:solidFill>
-                <a:latin typeface="Arial"/>
-              </a:rPr>
-              <a:t>8 min</a:t>
+              <a:rPr sz="900" b="1" i="0">
+                <a:solidFill>
+                  <a:srgbClr val="2B2B2B"/>
+                </a:solidFill>
+                <a:latin typeface="Arial"/>
+              </a:rPr>
+              <a:t>La montagne de déchets électroniques</a:t>
             </a:r>
           </a:p>
           <a:p>
@@ -4711,31 +4707,12 @@
               </a:spcAft>
             </a:pPr>
             <a:r>
-              <a:rPr sz="900" b="1" i="0">
+              <a:rPr sz="800" b="0" i="0">
                 <a:solidFill>
                   <a:srgbClr val="2B2B2B"/>
                 </a:solidFill>
                 <a:latin typeface="Arial"/>
               </a:rPr>
-              <a:t>La montagne de déchets électroniques</a:t>
-            </a:r>
-          </a:p>
-          <a:p>
-            <a:pPr algn="l">
-              <a:spcBef>
-                <a:spcPts val="0"/>
-              </a:spcBef>
-              <a:spcAft>
-                <a:spcPts val="100"/>
-              </a:spcAft>
-            </a:pPr>
-            <a:r>
-              <a:rPr sz="800" b="0" i="0">
-                <a:solidFill>
-                  <a:srgbClr val="2B2B2B"/>
-                </a:solidFill>
-                <a:latin typeface="Arial"/>
-              </a:rPr>
               <a:t>. Les Déchets d'Équipements Électriques et Électroniques (DEEE), ou "e-waste", représentent aujourd'hui le flux de déchets qui croît le plus rapidement dans le monde. C'est une problématique environnementale et sanitaire majeure.</a:t>
             </a:r>
           </a:p>
@@ -4743,7 +4720,7 @@
       </p:sp>
       <p:sp>
         <p:nvSpPr>
-          <p:cNvPr id="33" name="Rectangle 32"/>
+          <p:cNvPr id="32" name="Rectangle 31"/>
           <p:cNvSpPr/>
           <p:nvPr/>
         </p:nvSpPr>
@@ -4786,7 +4763,7 @@
       </p:sp>
       <p:sp>
         <p:nvSpPr>
-          <p:cNvPr id="34" name="Rectangle 33"/>
+          <p:cNvPr id="33" name="Rectangle 32"/>
           <p:cNvSpPr/>
           <p:nvPr/>
         </p:nvSpPr>
@@ -4827,7 +4804,7 @@
       </p:sp>
       <p:sp>
         <p:nvSpPr>
-          <p:cNvPr id="35" name="Rectangle 34"/>
+          <p:cNvPr id="34" name="Rectangle 33"/>
           <p:cNvSpPr/>
           <p:nvPr/>
         </p:nvSpPr>
@@ -4868,14 +4845,56 @@
       </p:sp>
       <p:sp>
         <p:nvSpPr>
+          <p:cNvPr id="35" name="TextBox 34"/>
+          <p:cNvSpPr txBox="1"/>
+          <p:nvPr/>
+        </p:nvSpPr>
+        <p:spPr>
+          <a:xfrm>
+            <a:off x="763200" y="6775200"/>
+            <a:ext cx="468000" cy="158400"/>
+          </a:xfrm>
+          <a:prstGeom prst="rect">
+            <a:avLst/>
+          </a:prstGeom>
+          <a:noFill/>
+        </p:spPr>
+        <p:txBody>
+          <a:bodyPr wrap="square" tIns="0" bIns="0" lIns="18000" rIns="18000">
+            <a:spAutoFit/>
+          </a:bodyPr>
+          <a:lstStyle/>
+          <a:p>
+            <a:pPr algn="ctr">
+              <a:spcBef>
+                <a:spcPts val="0"/>
+              </a:spcBef>
+              <a:spcAft>
+                <a:spcPts val="100"/>
+              </a:spcAft>
+            </a:pPr>
+            <a:r>
+              <a:rPr sz="800" b="1" i="0">
+                <a:solidFill>
+                  <a:srgbClr val="FFFFFF"/>
+                </a:solidFill>
+                <a:latin typeface="Arial"/>
+              </a:rPr>
+              <a:t>0:42</a:t>
+            </a:r>
+          </a:p>
+        </p:txBody>
+      </p:sp>
+      <p:sp>
+        <p:nvSpPr>
           <p:cNvPr id="36" name="TextBox 35"/>
           <p:cNvSpPr txBox="1"/>
           <p:nvPr/>
         </p:nvSpPr>
         <p:spPr>
           <a:xfrm>
-            <a:off x="763200" y="6775200"/>
-            <a:ext cx="468000" cy="158400"/>
+            <a:off x="1303200" y="6544800"/>
+            <a:ext cx="5652000" cy="655200"/>
           </a:xfrm>
           <a:prstGeom prst="rect">
             <a:avLst/>
@@ -4888,7 +4907,7 @@
           </a:bodyPr>
           <a:lstStyle/>
           <a:p>
-            <a:pPr algn="ctr">
+            <a:pPr algn="l">
               <a:spcBef>
                 <a:spcPts val="0"/>
               </a:spcBef>
@@ -4899,36 +4918,13 @@
             <a:r>
               <a:rPr sz="800" b="1" i="0">
                 <a:solidFill>
-                  <a:srgbClr val="FFFFFF"/>
-                </a:solidFill>
-                <a:latin typeface="Arial"/>
-              </a:rPr>
-              <a:t>0:42</a:t>
-            </a:r>
-          </a:p>
-        </p:txBody>
-      </p:sp>
-      <p:sp>
-        <p:nvSpPr>
-          <p:cNvPr id="37" name="TextBox 36"/>
-          <p:cNvSpPr txBox="1"/>
-          <p:nvPr/>
-        </p:nvSpPr>
-        <p:spPr>
-          <a:xfrm>
-            <a:off x="1303200" y="6544800"/>
-            <a:ext cx="5652000" cy="655200"/>
-          </a:xfrm>
-          <a:prstGeom prst="rect">
-            <a:avLst/>
-          </a:prstGeom>
-          <a:noFill/>
-        </p:spPr>
-        <p:txBody>
-          <a:bodyPr wrap="square" tIns="0" bIns="0" lIns="18000" rIns="18000">
-            <a:spAutoFit/>
-          </a:bodyPr>
-          <a:lstStyle/>
+                  <a:srgbClr val="5EB3D2"/>
+                </a:solidFill>
+                <a:latin typeface="Arial"/>
+              </a:rPr>
+              <a:t>8 min</a:t>
+            </a:r>
+          </a:p>
           <a:p>
             <a:pPr algn="l">
               <a:spcBef>
@@ -4939,13 +4935,13 @@
               </a:spcAft>
             </a:pPr>
             <a:r>
-              <a:rPr sz="800" b="1" i="0">
-                <a:solidFill>
-                  <a:srgbClr val="5EB3D2"/>
-                </a:solidFill>
-                <a:latin typeface="Arial"/>
-              </a:rPr>
-              <a:t>8 min</a:t>
+              <a:rPr sz="900" b="1" i="0">
+                <a:solidFill>
+                  <a:srgbClr val="2B2B2B"/>
+                </a:solidFill>
+                <a:latin typeface="Arial"/>
+              </a:rPr>
+              <a:t>L'obsolescence : le piège du renouvellement</a:t>
             </a:r>
           </a:p>
           <a:p>
@@ -4958,31 +4954,12 @@
               </a:spcAft>
             </a:pPr>
             <a:r>
-              <a:rPr sz="900" b="1" i="0">
+              <a:rPr sz="800" b="0" i="0">
                 <a:solidFill>
                   <a:srgbClr val="2B2B2B"/>
                 </a:solidFill>
                 <a:latin typeface="Arial"/>
               </a:rPr>
-              <a:t>L'obsolescence : le piège du renouvellement</a:t>
-            </a:r>
-          </a:p>
-          <a:p>
-            <a:pPr algn="l">
-              <a:spcBef>
-                <a:spcPts val="0"/>
-              </a:spcBef>
-              <a:spcAft>
-                <a:spcPts val="100"/>
-              </a:spcAft>
-            </a:pPr>
-            <a:r>
-              <a:rPr sz="800" b="0" i="0">
-                <a:solidFill>
-                  <a:srgbClr val="2B2B2B"/>
-                </a:solidFill>
-                <a:latin typeface="Arial"/>
-              </a:rPr>
               <a:t>. L'obsolescence, qu'elle soit programmée ou perçue, est un facteur majeur de l'empreinte environnementale du numérique. Elle nous pousse à renouveler nos appareils bien avant la fin de leur durée de vie potentielle.</a:t>
             </a:r>
           </a:p>
@@ -4990,7 +4967,7 @@
       </p:sp>
       <p:sp>
         <p:nvSpPr>
-          <p:cNvPr id="38" name="Rectangle 37"/>
+          <p:cNvPr id="37" name="Rectangle 36"/>
           <p:cNvSpPr/>
           <p:nvPr/>
         </p:nvSpPr>
@@ -5033,7 +5010,7 @@
       </p:sp>
       <p:sp>
         <p:nvSpPr>
-          <p:cNvPr id="39" name="Rectangle 38"/>
+          <p:cNvPr id="38" name="Rectangle 37"/>
           <p:cNvSpPr/>
           <p:nvPr/>
         </p:nvSpPr>
@@ -5074,7 +5051,7 @@
       </p:sp>
       <p:sp>
         <p:nvSpPr>
-          <p:cNvPr id="40" name="Rectangle 39"/>
+          <p:cNvPr id="39" name="Rectangle 38"/>
           <p:cNvSpPr/>
           <p:nvPr/>
         </p:nvSpPr>
@@ -5115,14 +5092,56 @@
       </p:sp>
       <p:sp>
         <p:nvSpPr>
+          <p:cNvPr id="40" name="TextBox 39"/>
+          <p:cNvSpPr txBox="1"/>
+          <p:nvPr/>
+        </p:nvSpPr>
+        <p:spPr>
+          <a:xfrm>
+            <a:off x="763200" y="7523999"/>
+            <a:ext cx="468000" cy="158400"/>
+          </a:xfrm>
+          <a:prstGeom prst="rect">
+            <a:avLst/>
+          </a:prstGeom>
+          <a:noFill/>
+        </p:spPr>
+        <p:txBody>
+          <a:bodyPr wrap="square" tIns="0" bIns="0" lIns="18000" rIns="18000">
+            <a:spAutoFit/>
+          </a:bodyPr>
+          <a:lstStyle/>
+          <a:p>
+            <a:pPr algn="ctr">
+              <a:spcBef>
+                <a:spcPts val="0"/>
+              </a:spcBef>
+              <a:spcAft>
+                <a:spcPts val="100"/>
+              </a:spcAft>
+            </a:pPr>
+            <a:r>
+              <a:rPr sz="800" b="1" i="0">
+                <a:solidFill>
+                  <a:srgbClr val="FFFFFF"/>
+                </a:solidFill>
+                <a:latin typeface="Arial"/>
+              </a:rPr>
+              <a:t>0:50</a:t>
+            </a:r>
+          </a:p>
+        </p:txBody>
+      </p:sp>
+      <p:sp>
+        <p:nvSpPr>
           <p:cNvPr id="41" name="TextBox 40"/>
           <p:cNvSpPr txBox="1"/>
           <p:nvPr/>
         </p:nvSpPr>
         <p:spPr>
           <a:xfrm>
-            <a:off x="763200" y="7523999"/>
-            <a:ext cx="468000" cy="158400"/>
+            <a:off x="1303200" y="7293599"/>
+            <a:ext cx="5652000" cy="655200"/>
           </a:xfrm>
           <a:prstGeom prst="rect">
             <a:avLst/>
@@ -5135,7 +5154,7 @@
           </a:bodyPr>
           <a:lstStyle/>
           <a:p>
-            <a:pPr algn="ctr">
+            <a:pPr algn="l">
               <a:spcBef>
                 <a:spcPts val="0"/>
               </a:spcBef>
@@ -5146,36 +5165,13 @@
             <a:r>
               <a:rPr sz="800" b="1" i="0">
                 <a:solidFill>
-                  <a:srgbClr val="FFFFFF"/>
-                </a:solidFill>
-                <a:latin typeface="Arial"/>
-              </a:rPr>
-              <a:t>0:50</a:t>
-            </a:r>
-          </a:p>
-        </p:txBody>
-      </p:sp>
-      <p:sp>
-        <p:nvSpPr>
-          <p:cNvPr id="42" name="TextBox 41"/>
-          <p:cNvSpPr txBox="1"/>
-          <p:nvPr/>
-        </p:nvSpPr>
-        <p:spPr>
-          <a:xfrm>
-            <a:off x="1303200" y="7293599"/>
-            <a:ext cx="5652000" cy="655200"/>
-          </a:xfrm>
-          <a:prstGeom prst="rect">
-            <a:avLst/>
-          </a:prstGeom>
-          <a:noFill/>
-        </p:spPr>
-        <p:txBody>
-          <a:bodyPr wrap="square" tIns="0" bIns="0" lIns="18000" rIns="18000">
-            <a:spAutoFit/>
-          </a:bodyPr>
-          <a:lstStyle/>
+                  <a:srgbClr val="5EB3D2"/>
+                </a:solidFill>
+                <a:latin typeface="Arial"/>
+              </a:rPr>
+              <a:t>8 min</a:t>
+            </a:r>
+          </a:p>
           <a:p>
             <a:pPr algn="l">
               <a:spcBef>
@@ -5186,13 +5182,13 @@
               </a:spcAft>
             </a:pPr>
             <a:r>
-              <a:rPr sz="800" b="1" i="0">
-                <a:solidFill>
-                  <a:srgbClr val="5EB3D2"/>
-                </a:solidFill>
-                <a:latin typeface="Arial"/>
-              </a:rPr>
-              <a:t>8 min</a:t>
+              <a:rPr sz="900" b="1" i="0">
+                <a:solidFill>
+                  <a:srgbClr val="2B2B2B"/>
+                </a:solidFill>
+                <a:latin typeface="Arial"/>
+              </a:rPr>
+              <a:t>Allonger la vie de ses appareils</a:t>
             </a:r>
           </a:p>
           <a:p>
@@ -5205,31 +5201,12 @@
               </a:spcAft>
             </a:pPr>
             <a:r>
-              <a:rPr sz="900" b="1" i="0">
+              <a:rPr sz="800" b="0" i="0">
                 <a:solidFill>
                   <a:srgbClr val="2B2B2B"/>
                 </a:solidFill>
                 <a:latin typeface="Arial"/>
               </a:rPr>
-              <a:t>Allonger la vie de ses appareils</a:t>
-            </a:r>
-          </a:p>
-          <a:p>
-            <a:pPr algn="l">
-              <a:spcBef>
-                <a:spcPts val="0"/>
-              </a:spcBef>
-              <a:spcAft>
-                <a:spcPts val="100"/>
-              </a:spcAft>
-            </a:pPr>
-            <a:r>
-              <a:rPr sz="800" b="0" i="0">
-                <a:solidFill>
-                  <a:srgbClr val="2B2B2B"/>
-                </a:solidFill>
-                <a:latin typeface="Arial"/>
-              </a:rPr>
               <a:t>. Plutôt que de céder à l'obsolescence programmée ou perçue, adoptons des gestes simples pour prolonger la durée de vie de nos équipements. Chaque année gagnée, c'est une réduction significative de leur empreinte environnementale.</a:t>
             </a:r>
           </a:p>
@@ -5237,7 +5214,7 @@
       </p:sp>
       <p:sp>
         <p:nvSpPr>
-          <p:cNvPr id="43" name="Rectangle 42"/>
+          <p:cNvPr id="42" name="Rectangle 41"/>
           <p:cNvSpPr/>
           <p:nvPr/>
         </p:nvSpPr>
@@ -5280,7 +5257,7 @@
       </p:sp>
       <p:sp>
         <p:nvSpPr>
-          <p:cNvPr id="44" name="Rectangle 43"/>
+          <p:cNvPr id="43" name="Rectangle 42"/>
           <p:cNvSpPr/>
           <p:nvPr/>
         </p:nvSpPr>
@@ -5321,7 +5298,7 @@
       </p:sp>
       <p:sp>
         <p:nvSpPr>
-          <p:cNvPr id="45" name="Rectangle 44"/>
+          <p:cNvPr id="44" name="Rectangle 43"/>
           <p:cNvSpPr/>
           <p:nvPr/>
         </p:nvSpPr>
@@ -5362,14 +5339,56 @@
       </p:sp>
       <p:sp>
         <p:nvSpPr>
+          <p:cNvPr id="45" name="TextBox 44"/>
+          <p:cNvSpPr txBox="1"/>
+          <p:nvPr/>
+        </p:nvSpPr>
+        <p:spPr>
+          <a:xfrm>
+            <a:off x="763200" y="8272799"/>
+            <a:ext cx="468000" cy="158400"/>
+          </a:xfrm>
+          <a:prstGeom prst="rect">
+            <a:avLst/>
+          </a:prstGeom>
+          <a:noFill/>
+        </p:spPr>
+        <p:txBody>
+          <a:bodyPr wrap="square" tIns="0" bIns="0" lIns="18000" rIns="18000">
+            <a:spAutoFit/>
+          </a:bodyPr>
+          <a:lstStyle/>
+          <a:p>
+            <a:pPr algn="ctr">
+              <a:spcBef>
+                <a:spcPts val="0"/>
+              </a:spcBef>
+              <a:spcAft>
+                <a:spcPts val="100"/>
+              </a:spcAft>
+            </a:pPr>
+            <a:r>
+              <a:rPr sz="800" b="1" i="0">
+                <a:solidFill>
+                  <a:srgbClr val="FFFFFF"/>
+                </a:solidFill>
+                <a:latin typeface="Arial"/>
+              </a:rPr>
+              <a:t>0:58</a:t>
+            </a:r>
+          </a:p>
+        </p:txBody>
+      </p:sp>
+      <p:sp>
+        <p:nvSpPr>
           <p:cNvPr id="46" name="TextBox 45"/>
           <p:cNvSpPr txBox="1"/>
           <p:nvPr/>
         </p:nvSpPr>
         <p:spPr>
           <a:xfrm>
-            <a:off x="763200" y="8272799"/>
-            <a:ext cx="468000" cy="158400"/>
+            <a:off x="1303200" y="8042399"/>
+            <a:ext cx="5652000" cy="655200"/>
           </a:xfrm>
           <a:prstGeom prst="rect">
             <a:avLst/>
@@ -5382,7 +5401,7 @@
           </a:bodyPr>
           <a:lstStyle/>
           <a:p>
-            <a:pPr algn="ctr">
+            <a:pPr algn="l">
               <a:spcBef>
                 <a:spcPts val="0"/>
               </a:spcBef>
@@ -5393,36 +5412,13 @@
             <a:r>
               <a:rPr sz="800" b="1" i="0">
                 <a:solidFill>
-                  <a:srgbClr val="FFFFFF"/>
-                </a:solidFill>
-                <a:latin typeface="Arial"/>
-              </a:rPr>
-              <a:t>0:58</a:t>
-            </a:r>
-          </a:p>
-        </p:txBody>
-      </p:sp>
-      <p:sp>
-        <p:nvSpPr>
-          <p:cNvPr id="47" name="TextBox 46"/>
-          <p:cNvSpPr txBox="1"/>
-          <p:nvPr/>
-        </p:nvSpPr>
-        <p:spPr>
-          <a:xfrm>
-            <a:off x="1303200" y="8042399"/>
-            <a:ext cx="5652000" cy="655200"/>
-          </a:xfrm>
-          <a:prstGeom prst="rect">
-            <a:avLst/>
-          </a:prstGeom>
-          <a:noFill/>
-        </p:spPr>
-        <p:txBody>
-          <a:bodyPr wrap="square" tIns="0" bIns="0" lIns="18000" rIns="18000">
-            <a:spAutoFit/>
-          </a:bodyPr>
-          <a:lstStyle/>
+                  <a:srgbClr val="4388BC"/>
+                </a:solidFill>
+                <a:latin typeface="Arial"/>
+              </a:rPr>
+              <a:t>8 min</a:t>
+            </a:r>
+          </a:p>
           <a:p>
             <a:pPr algn="l">
               <a:spcBef>
@@ -5433,13 +5429,13 @@
               </a:spcAft>
             </a:pPr>
             <a:r>
-              <a:rPr sz="800" b="1" i="0">
-                <a:solidFill>
-                  <a:srgbClr val="4388BC"/>
-                </a:solidFill>
-                <a:latin typeface="Arial"/>
-              </a:rPr>
-              <a:t>8 min</a:t>
+              <a:rPr sz="900" b="1" i="0">
+                <a:solidFill>
+                  <a:srgbClr val="2B2B2B"/>
+                </a:solidFill>
+                <a:latin typeface="Arial"/>
+              </a:rPr>
+              <a:t>La sobriété numérique au quotidien</a:t>
             </a:r>
           </a:p>
           <a:p>
@@ -5452,31 +5448,12 @@
               </a:spcAft>
             </a:pPr>
             <a:r>
-              <a:rPr sz="900" b="1" i="0">
+              <a:rPr sz="800" b="0" i="0">
                 <a:solidFill>
                   <a:srgbClr val="2B2B2B"/>
                 </a:solidFill>
                 <a:latin typeface="Arial"/>
               </a:rPr>
-              <a:t>La sobriété numérique au quotidien</a:t>
-            </a:r>
-          </a:p>
-          <a:p>
-            <a:pPr algn="l">
-              <a:spcBef>
-                <a:spcPts val="0"/>
-              </a:spcBef>
-              <a:spcAft>
-                <a:spcPts val="100"/>
-              </a:spcAft>
-            </a:pPr>
-            <a:r>
-              <a:rPr sz="800" b="0" i="0">
-                <a:solidFill>
-                  <a:srgbClr val="2B2B2B"/>
-                </a:solidFill>
-                <a:latin typeface="Arial"/>
-              </a:rPr>
               <a:t>. Adopter de petits gestes au quotidien peut avoir un impact significatif sur la réduction de votre empreinte numérique. Chaque action compte pour une consommation plus responsable des ressources.</a:t>
             </a:r>
           </a:p>
@@ -5484,7 +5461,7 @@
       </p:sp>
       <p:sp>
         <p:nvSpPr>
-          <p:cNvPr id="48" name="Rectangle 47"/>
+          <p:cNvPr id="47" name="Rectangle 46"/>
           <p:cNvSpPr/>
           <p:nvPr/>
         </p:nvSpPr>
@@ -5527,7 +5504,7 @@
       </p:sp>
       <p:sp>
         <p:nvSpPr>
-          <p:cNvPr id="49" name="Rectangle 48"/>
+          <p:cNvPr id="48" name="Rectangle 47"/>
           <p:cNvSpPr/>
           <p:nvPr/>
         </p:nvSpPr>
@@ -5568,7 +5545,7 @@
       </p:sp>
       <p:sp>
         <p:nvSpPr>
-          <p:cNvPr id="50" name="Rectangle 49"/>
+          <p:cNvPr id="49" name="Rectangle 48"/>
           <p:cNvSpPr/>
           <p:nvPr/>
         </p:nvSpPr>
@@ -5609,7 +5586,7 @@
       </p:sp>
       <p:sp>
         <p:nvSpPr>
-          <p:cNvPr id="51" name="TextBox 50"/>
+          <p:cNvPr id="50" name="TextBox 49"/>
           <p:cNvSpPr txBox="1"/>
           <p:nvPr/>
         </p:nvSpPr>
@@ -5651,7 +5628,7 @@
       </p:sp>
       <p:sp>
         <p:nvSpPr>
-          <p:cNvPr id="52" name="TextBox 51"/>
+          <p:cNvPr id="51" name="TextBox 50"/>
           <p:cNvSpPr txBox="1"/>
           <p:nvPr/>
         </p:nvSpPr>
@@ -5742,9 +5719,12 @@
   <p:cSld>
     <p:bg>
       <p:bgPr>
-        <a:solidFill>
-          <a:srgbClr val="FFFFFF"/>
-        </a:solidFill>
+        <a:blipFill>
+          <a:blip r:embed="rId2"/>
+          <a:stretch>
+            <a:fillRect/>
+          </a:stretch>
+        </a:blipFill>
         <a:effectLst/>
       </p:bgPr>
     </p:bg>
@@ -5755,35 +5735,9 @@
         <p:nvPr/>
       </p:nvGrpSpPr>
       <p:grpSpPr/>
-      <p:pic>
-        <p:nvPicPr>
-          <p:cNvPr id="2" name="Picture 1" descr="bg-p2.png"/>
-          <p:cNvPicPr>
-            <a:picLocks noChangeAspect="1"/>
-          </p:cNvPicPr>
-          <p:nvPr/>
-        </p:nvPicPr>
-        <p:blipFill>
-          <a:blip r:embed="rId2">
-            <a:alphaModFix amt="80000"/>
-          </a:blip>
-          <a:stretch>
-            <a:fillRect/>
-          </a:stretch>
-        </p:blipFill>
-        <p:spPr>
-          <a:xfrm>
-            <a:off x="0" y="0"/>
-            <a:ext cx="7556399" cy="10692000"/>
-          </a:xfrm>
-          <a:prstGeom prst="rect">
-            <a:avLst/>
-          </a:prstGeom>
-        </p:spPr>
-      </p:pic>
-      <p:sp>
-        <p:nvSpPr>
-          <p:cNvPr id="3" name="Rectangle 2"/>
+      <p:sp>
+        <p:nvSpPr>
+          <p:cNvPr id="2" name="Rectangle 1"/>
           <p:cNvSpPr/>
           <p:nvPr/>
         </p:nvSpPr>
@@ -5826,7 +5780,7 @@
       </p:sp>
       <p:sp>
         <p:nvSpPr>
-          <p:cNvPr id="4" name="Rectangle 3"/>
+          <p:cNvPr id="3" name="Rectangle 2"/>
           <p:cNvSpPr/>
           <p:nvPr/>
         </p:nvSpPr>
@@ -5867,7 +5821,7 @@
       </p:sp>
       <p:sp>
         <p:nvSpPr>
-          <p:cNvPr id="5" name="Rectangle 4"/>
+          <p:cNvPr id="4" name="Rectangle 3"/>
           <p:cNvSpPr/>
           <p:nvPr/>
         </p:nvSpPr>
@@ -5908,14 +5862,56 @@
       </p:sp>
       <p:sp>
         <p:nvSpPr>
+          <p:cNvPr id="5" name="TextBox 4"/>
+          <p:cNvSpPr txBox="1"/>
+          <p:nvPr/>
+        </p:nvSpPr>
+        <p:spPr>
+          <a:xfrm>
+            <a:off x="763200" y="835200"/>
+            <a:ext cx="468000" cy="158400"/>
+          </a:xfrm>
+          <a:prstGeom prst="rect">
+            <a:avLst/>
+          </a:prstGeom>
+          <a:noFill/>
+        </p:spPr>
+        <p:txBody>
+          <a:bodyPr wrap="square" tIns="0" bIns="0" lIns="18000" rIns="18000">
+            <a:spAutoFit/>
+          </a:bodyPr>
+          <a:lstStyle/>
+          <a:p>
+            <a:pPr algn="ctr">
+              <a:spcBef>
+                <a:spcPts val="0"/>
+              </a:spcBef>
+              <a:spcAft>
+                <a:spcPts val="100"/>
+              </a:spcAft>
+            </a:pPr>
+            <a:r>
+              <a:rPr sz="800" b="1" i="0">
+                <a:solidFill>
+                  <a:srgbClr val="FFFFFF"/>
+                </a:solidFill>
+                <a:latin typeface="Arial"/>
+              </a:rPr>
+              <a:t>1:14</a:t>
+            </a:r>
+          </a:p>
+        </p:txBody>
+      </p:sp>
+      <p:sp>
+        <p:nvSpPr>
           <p:cNvPr id="6" name="TextBox 5"/>
           <p:cNvSpPr txBox="1"/>
           <p:nvPr/>
         </p:nvSpPr>
         <p:spPr>
           <a:xfrm>
-            <a:off x="763200" y="835200"/>
-            <a:ext cx="468000" cy="158400"/>
+            <a:off x="1303200" y="604800"/>
+            <a:ext cx="5652000" cy="655200"/>
           </a:xfrm>
           <a:prstGeom prst="rect">
             <a:avLst/>
@@ -5928,7 +5924,7 @@
           </a:bodyPr>
           <a:lstStyle/>
           <a:p>
-            <a:pPr algn="ctr">
+            <a:pPr algn="l">
               <a:spcBef>
                 <a:spcPts val="0"/>
               </a:spcBef>
@@ -5939,36 +5935,13 @@
             <a:r>
               <a:rPr sz="800" b="1" i="0">
                 <a:solidFill>
-                  <a:srgbClr val="FFFFFF"/>
-                </a:solidFill>
-                <a:latin typeface="Arial"/>
-              </a:rPr>
-              <a:t>1:14</a:t>
-            </a:r>
-          </a:p>
-        </p:txBody>
-      </p:sp>
-      <p:sp>
-        <p:nvSpPr>
-          <p:cNvPr id="7" name="TextBox 6"/>
-          <p:cNvSpPr txBox="1"/>
-          <p:nvPr/>
-        </p:nvSpPr>
-        <p:spPr>
-          <a:xfrm>
-            <a:off x="1303200" y="604800"/>
-            <a:ext cx="5652000" cy="655200"/>
-          </a:xfrm>
-          <a:prstGeom prst="rect">
-            <a:avLst/>
-          </a:prstGeom>
-          <a:noFill/>
-        </p:spPr>
-        <p:txBody>
-          <a:bodyPr wrap="square" tIns="0" bIns="0" lIns="18000" rIns="18000">
-            <a:spAutoFit/>
-          </a:bodyPr>
-          <a:lstStyle/>
+                  <a:srgbClr val="4388BC"/>
+                </a:solidFill>
+                <a:latin typeface="Arial"/>
+              </a:rPr>
+              <a:t>8 min</a:t>
+            </a:r>
+          </a:p>
           <a:p>
             <a:pPr algn="l">
               <a:spcBef>
@@ -5979,13 +5952,13 @@
               </a:spcAft>
             </a:pPr>
             <a:r>
-              <a:rPr sz="800" b="1" i="0">
-                <a:solidFill>
-                  <a:srgbClr val="4388BC"/>
-                </a:solidFill>
-                <a:latin typeface="Arial"/>
-              </a:rPr>
-              <a:t>8 min</a:t>
+              <a:rPr sz="900" b="1" i="0">
+                <a:solidFill>
+                  <a:srgbClr val="2B2B2B"/>
+                </a:solidFill>
+                <a:latin typeface="Arial"/>
+              </a:rPr>
+              <a:t>Des solutions collectives et réglementaires</a:t>
             </a:r>
           </a:p>
           <a:p>
@@ -5998,31 +5971,12 @@
               </a:spcAft>
             </a:pPr>
             <a:r>
-              <a:rPr sz="900" b="1" i="0">
+              <a:rPr sz="800" b="0" i="0">
                 <a:solidFill>
                   <a:srgbClr val="2B2B2B"/>
                 </a:solidFill>
                 <a:latin typeface="Arial"/>
               </a:rPr>
-              <a:t>Des solutions collectives et réglementaires</a:t>
-            </a:r>
-          </a:p>
-          <a:p>
-            <a:pPr algn="l">
-              <a:spcBef>
-                <a:spcPts val="0"/>
-              </a:spcBef>
-              <a:spcAft>
-                <a:spcPts val="100"/>
-              </a:spcAft>
-            </a:pPr>
-            <a:r>
-              <a:rPr sz="800" b="0" i="0">
-                <a:solidFill>
-                  <a:srgbClr val="2B2B2B"/>
-                </a:solidFill>
-                <a:latin typeface="Arial"/>
-              </a:rPr>
               <a:t>. Face aux enjeux du numérique, des cadres réglementaires et des initiatives collectives émergent pour encourager des pratiques plus durables. Ces efforts visent à transformer en profondeur nos modes de production et de consommation.</a:t>
             </a:r>
           </a:p>
@@ -6030,7 +5984,7 @@
       </p:sp>
       <p:sp>
         <p:nvSpPr>
-          <p:cNvPr id="8" name="Rectangle 7"/>
+          <p:cNvPr id="7" name="Rectangle 6"/>
           <p:cNvSpPr/>
           <p:nvPr/>
         </p:nvSpPr>
@@ -6073,7 +6027,7 @@
       </p:sp>
       <p:sp>
         <p:nvSpPr>
-          <p:cNvPr id="9" name="Rectangle 8"/>
+          <p:cNvPr id="8" name="Rectangle 7"/>
           <p:cNvSpPr/>
           <p:nvPr/>
         </p:nvSpPr>
@@ -6114,7 +6068,7 @@
       </p:sp>
       <p:sp>
         <p:nvSpPr>
-          <p:cNvPr id="10" name="Rectangle 9"/>
+          <p:cNvPr id="9" name="Rectangle 8"/>
           <p:cNvSpPr/>
           <p:nvPr/>
         </p:nvSpPr>
@@ -6155,14 +6109,56 @@
       </p:sp>
       <p:sp>
         <p:nvSpPr>
+          <p:cNvPr id="10" name="TextBox 9"/>
+          <p:cNvSpPr txBox="1"/>
+          <p:nvPr/>
+        </p:nvSpPr>
+        <p:spPr>
+          <a:xfrm>
+            <a:off x="763200" y="1584000"/>
+            <a:ext cx="468000" cy="158400"/>
+          </a:xfrm>
+          <a:prstGeom prst="rect">
+            <a:avLst/>
+          </a:prstGeom>
+          <a:noFill/>
+        </p:spPr>
+        <p:txBody>
+          <a:bodyPr wrap="square" tIns="0" bIns="0" lIns="18000" rIns="18000">
+            <a:spAutoFit/>
+          </a:bodyPr>
+          <a:lstStyle/>
+          <a:p>
+            <a:pPr algn="ctr">
+              <a:spcBef>
+                <a:spcPts val="0"/>
+              </a:spcBef>
+              <a:spcAft>
+                <a:spcPts val="100"/>
+              </a:spcAft>
+            </a:pPr>
+            <a:r>
+              <a:rPr sz="800" b="1" i="0">
+                <a:solidFill>
+                  <a:srgbClr val="FFFFFF"/>
+                </a:solidFill>
+                <a:latin typeface="Arial"/>
+              </a:rPr>
+              <a:t>1:22</a:t>
+            </a:r>
+          </a:p>
+        </p:txBody>
+      </p:sp>
+      <p:sp>
+        <p:nvSpPr>
           <p:cNvPr id="11" name="TextBox 10"/>
           <p:cNvSpPr txBox="1"/>
           <p:nvPr/>
         </p:nvSpPr>
         <p:spPr>
           <a:xfrm>
-            <a:off x="763200" y="1584000"/>
-            <a:ext cx="468000" cy="158400"/>
+            <a:off x="1303200" y="1353600"/>
+            <a:ext cx="5652000" cy="655200"/>
           </a:xfrm>
           <a:prstGeom prst="rect">
             <a:avLst/>
@@ -6175,7 +6171,7 @@
           </a:bodyPr>
           <a:lstStyle/>
           <a:p>
-            <a:pPr algn="ctr">
+            <a:pPr algn="l">
               <a:spcBef>
                 <a:spcPts val="0"/>
               </a:spcBef>
@@ -6186,36 +6182,13 @@
             <a:r>
               <a:rPr sz="800" b="1" i="0">
                 <a:solidFill>
-                  <a:srgbClr val="FFFFFF"/>
-                </a:solidFill>
-                <a:latin typeface="Arial"/>
-              </a:rPr>
-              <a:t>1:22</a:t>
-            </a:r>
-          </a:p>
-        </p:txBody>
-      </p:sp>
-      <p:sp>
-        <p:nvSpPr>
-          <p:cNvPr id="12" name="TextBox 11"/>
-          <p:cNvSpPr txBox="1"/>
-          <p:nvPr/>
-        </p:nvSpPr>
-        <p:spPr>
-          <a:xfrm>
-            <a:off x="1303200" y="1353600"/>
-            <a:ext cx="5652000" cy="655200"/>
-          </a:xfrm>
-          <a:prstGeom prst="rect">
-            <a:avLst/>
-          </a:prstGeom>
-          <a:noFill/>
-        </p:spPr>
-        <p:txBody>
-          <a:bodyPr wrap="square" tIns="0" bIns="0" lIns="18000" rIns="18000">
-            <a:spAutoFit/>
-          </a:bodyPr>
-          <a:lstStyle/>
+                  <a:srgbClr val="187C88"/>
+                </a:solidFill>
+                <a:latin typeface="Arial"/>
+              </a:rPr>
+              <a:t>8 min</a:t>
+            </a:r>
+          </a:p>
           <a:p>
             <a:pPr algn="l">
               <a:spcBef>
@@ -6226,13 +6199,13 @@
               </a:spcAft>
             </a:pPr>
             <a:r>
-              <a:rPr sz="800" b="1" i="0">
-                <a:solidFill>
-                  <a:srgbClr val="187C88"/>
-                </a:solidFill>
-                <a:latin typeface="Arial"/>
-              </a:rPr>
-              <a:t>8 min</a:t>
+              <a:rPr sz="900" b="1" i="0">
+                <a:solidFill>
+                  <a:srgbClr val="2B2B2B"/>
+                </a:solidFill>
+                <a:latin typeface="Arial"/>
+              </a:rPr>
+              <a:t>À vous de jouer !</a:t>
             </a:r>
           </a:p>
           <a:p>
@@ -6245,31 +6218,12 @@
               </a:spcAft>
             </a:pPr>
             <a:r>
-              <a:rPr sz="900" b="1" i="0">
+              <a:rPr sz="800" b="0" i="0">
                 <a:solidFill>
                   <a:srgbClr val="2B2B2B"/>
                 </a:solidFill>
                 <a:latin typeface="Arial"/>
               </a:rPr>
-              <a:t>À vous de jouer !</a:t>
-            </a:r>
-          </a:p>
-          <a:p>
-            <a:pPr algn="l">
-              <a:spcBef>
-                <a:spcPts val="0"/>
-              </a:spcBef>
-              <a:spcAft>
-                <a:spcPts val="100"/>
-              </a:spcAft>
-            </a:pPr>
-            <a:r>
-              <a:rPr sz="800" b="0" i="0">
-                <a:solidFill>
-                  <a:srgbClr val="2B2B2B"/>
-                </a:solidFill>
-                <a:latin typeface="Arial"/>
-              </a:rPr>
               <a:t>. Répondez à ces questions individuellement ou en petits groupes, puis partagez vos réflexions avec le reste de l'atelier.</a:t>
             </a:r>
           </a:p>
@@ -6277,7 +6231,7 @@
       </p:sp>
       <p:sp>
         <p:nvSpPr>
-          <p:cNvPr id="13" name="Rectangle 12"/>
+          <p:cNvPr id="12" name="Rectangle 11"/>
           <p:cNvSpPr/>
           <p:nvPr/>
         </p:nvSpPr>
@@ -6320,7 +6274,7 @@
       </p:sp>
       <p:sp>
         <p:nvSpPr>
-          <p:cNvPr id="14" name="Rectangle 13"/>
+          <p:cNvPr id="13" name="Rectangle 12"/>
           <p:cNvSpPr/>
           <p:nvPr/>
         </p:nvSpPr>
@@ -6361,7 +6315,7 @@
       </p:sp>
       <p:sp>
         <p:nvSpPr>
-          <p:cNvPr id="15" name="TextBox 14"/>
+          <p:cNvPr id="14" name="TextBox 13"/>
           <p:cNvSpPr txBox="1"/>
           <p:nvPr/>
         </p:nvSpPr>
@@ -6403,7 +6357,7 @@
       </p:sp>
       <p:sp>
         <p:nvSpPr>
-          <p:cNvPr id="16" name="Rectangle 15"/>
+          <p:cNvPr id="15" name="Rectangle 14"/>
           <p:cNvSpPr/>
           <p:nvPr/>
         </p:nvSpPr>
@@ -6444,7 +6398,7 @@
       </p:sp>
       <p:sp>
         <p:nvSpPr>
-          <p:cNvPr id="17" name="TextBox 16"/>
+          <p:cNvPr id="16" name="TextBox 15"/>
           <p:cNvSpPr txBox="1"/>
           <p:nvPr/>
         </p:nvSpPr>
@@ -6571,7 +6525,7 @@
       </p:sp>
       <p:sp>
         <p:nvSpPr>
-          <p:cNvPr id="18" name="Rectangle 17"/>
+          <p:cNvPr id="17" name="Rectangle 16"/>
           <p:cNvSpPr/>
           <p:nvPr/>
         </p:nvSpPr>
@@ -6612,7 +6566,7 @@
       </p:sp>
       <p:sp>
         <p:nvSpPr>
-          <p:cNvPr id="19" name="TextBox 18"/>
+          <p:cNvPr id="18" name="TextBox 17"/>
           <p:cNvSpPr txBox="1"/>
           <p:nvPr/>
         </p:nvSpPr>
@@ -6739,7 +6693,7 @@
       </p:sp>
       <p:sp>
         <p:nvSpPr>
-          <p:cNvPr id="20" name="Rectangle 19"/>
+          <p:cNvPr id="19" name="Rectangle 18"/>
           <p:cNvSpPr/>
           <p:nvPr/>
         </p:nvSpPr>
@@ -6780,7 +6734,7 @@
       </p:sp>
       <p:sp>
         <p:nvSpPr>
-          <p:cNvPr id="21" name="TextBox 20"/>
+          <p:cNvPr id="20" name="TextBox 19"/>
           <p:cNvSpPr txBox="1"/>
           <p:nvPr/>
         </p:nvSpPr>
@@ -6907,7 +6861,7 @@
       </p:sp>
       <p:sp>
         <p:nvSpPr>
-          <p:cNvPr id="22" name="Rectangle 21"/>
+          <p:cNvPr id="21" name="Rectangle 20"/>
           <p:cNvSpPr/>
           <p:nvPr/>
         </p:nvSpPr>
@@ -6948,7 +6902,7 @@
       </p:sp>
       <p:sp>
         <p:nvSpPr>
-          <p:cNvPr id="23" name="TextBox 22"/>
+          <p:cNvPr id="22" name="TextBox 21"/>
           <p:cNvSpPr txBox="1"/>
           <p:nvPr/>
         </p:nvSpPr>
